--- a/ppt/MLOps08-Flask.pptx
+++ b/ppt/MLOps08-Flask.pptx
@@ -5712,7 +5712,7 @@
             <a:pPr lvl="1"/>
             <a:r>
               <a:rPr lang="fr-FR" dirty="0"/>
-              <a:t>Peut être exposé sur 80 : SSL + NGINX</a:t>
+              <a:t>Peut être exposé sur 80 &amp; 443 : SSL + NGINX</a:t>
             </a:r>
           </a:p>
         </p:txBody>
